--- a/generated/Tier 1 Broker Scorecards/Dts Insurance Services Inc_Broker_Scorecard.pptx
+++ b/generated/Tier 1 Broker Scorecards/Dts Insurance Services Inc_Broker_Scorecard.pptx
@@ -3357,7 +3357,7 @@
                         <a:rPr sz="800">
                           <a:latin typeface="Segoe UI"/>
                         </a:rPr>
-                        <a:t>$907,581.59 / $1,032,802.67 / $499,049.01</a:t>
+                        <a:t>$907,581.59 / $1,044,378.10 / $510,624.44</a:t>
                       </a:r>
                     </a:p>
                   </a:txBody>
@@ -3431,7 +3431,7 @@
                         <a:rPr sz="900">
                           <a:latin typeface="Segoe UI"/>
                         </a:rPr>
-                        <a:t>$1,270,614.23  (39.3% achieved)</a:t>
+                        <a:t>$1,270,614.23  (40.2% achieved)</a:t>
                       </a:r>
                     </a:p>
                   </a:txBody>
@@ -3690,7 +3690,7 @@
                         <a:rPr sz="900">
                           <a:latin typeface="Segoe UI"/>
                         </a:rPr>
-                        <a:t>Fleet Bound Premium: $95,488.56</a:t>
+                        <a:t>Fleet Bound Premium: $97,703.41</a:t>
                       </a:r>
                     </a:p>
                   </a:txBody>
@@ -3803,7 +3803,7 @@
                         <a:rPr sz="900">
                           <a:latin typeface="Segoe UI"/>
                         </a:rPr>
-                        <a:t>Non-Fleet Bound Premium: $403,560.45</a:t>
+                        <a:t>Non-Fleet Bound Premium: $412,921.03</a:t>
                       </a:r>
                     </a:p>
                   </a:txBody>
@@ -4428,7 +4428,7 @@
                           </a:solidFill>
                           <a:latin typeface="Segoe UI"/>
                         </a:rPr>
-                        <a:t>17</a:t>
+                        <a:t>18</a:t>
                       </a:r>
                     </a:p>
                   </a:txBody>
@@ -4624,7 +4624,7 @@
                           </a:solidFill>
                           <a:latin typeface="Segoe UI"/>
                         </a:rPr>
-                        <a:t>33.3%</a:t>
+                        <a:t>37.0%</a:t>
                       </a:r>
                     </a:p>
                   </a:txBody>
@@ -4903,7 +4903,7 @@
                           </a:solidFill>
                           <a:latin typeface="Segoe UI"/>
                         </a:rPr>
-                        <a:t>9</a:t>
+                        <a:t>10</a:t>
                       </a:r>
                     </a:p>
                   </a:txBody>
@@ -5256,7 +5256,7 @@
                           </a:solidFill>
                           <a:latin typeface="Segoe UI"/>
                         </a:rPr>
-                        <a:t>$92.7K</a:t>
+                        <a:t>$104.3K</a:t>
                       </a:r>
                     </a:p>
                   </a:txBody>

--- a/generated/Tier 1 Broker Scorecards/Dts Insurance Services Inc_Broker_Scorecard.pptx
+++ b/generated/Tier 1 Broker Scorecards/Dts Insurance Services Inc_Broker_Scorecard.pptx
@@ -3653,7 +3653,7 @@
                         <a:rPr sz="900">
                           <a:latin typeface="Segoe UI"/>
                         </a:rPr>
-                        <a:t>Fleet Subs: 14  |  Binds: 1</a:t>
+                        <a:t>Fleet Subs: 14  |  Binds: 0</a:t>
                       </a:r>
                     </a:p>
                   </a:txBody>
@@ -3690,7 +3690,7 @@
                         <a:rPr sz="900">
                           <a:latin typeface="Segoe UI"/>
                         </a:rPr>
-                        <a:t>Fleet Bound Premium: $97,703.41</a:t>
+                        <a:t>Fleet Bound Premium: $0.00</a:t>
                       </a:r>
                     </a:p>
                   </a:txBody>
@@ -3727,7 +3727,7 @@
                         <a:rPr sz="900">
                           <a:latin typeface="Segoe UI"/>
                         </a:rPr>
-                        <a:t>Fleet Book %: 19.1%</a:t>
+                        <a:t>Fleet Book %: 0.0%</a:t>
                       </a:r>
                     </a:p>
                   </a:txBody>
@@ -3766,7 +3766,7 @@
                         <a:rPr sz="900">
                           <a:latin typeface="Segoe UI"/>
                         </a:rPr>
-                        <a:t>Non-Fleet Subs: 97  |  Binds: 10</a:t>
+                        <a:t>Non-Fleet Subs: 97  |  Binds: 11</a:t>
                       </a:r>
                     </a:p>
                   </a:txBody>
@@ -3803,7 +3803,7 @@
                         <a:rPr sz="900">
                           <a:latin typeface="Segoe UI"/>
                         </a:rPr>
-                        <a:t>Non-Fleet Bound Premium: $412,921.03</a:t>
+                        <a:t>Non-Fleet Bound Premium: $510,624.44</a:t>
                       </a:r>
                     </a:p>
                   </a:txBody>
@@ -3840,7 +3840,7 @@
                         <a:rPr sz="900">
                           <a:latin typeface="Segoe UI"/>
                         </a:rPr>
-                        <a:t>Non-Fleet Book %: 80.9%</a:t>
+                        <a:t>Non-Fleet Book %: 100.0%</a:t>
                       </a:r>
                     </a:p>
                   </a:txBody>
@@ -4428,7 +4428,7 @@
                           </a:solidFill>
                           <a:latin typeface="Segoe UI"/>
                         </a:rPr>
-                        <a:t>18</a:t>
+                        <a:t>19</a:t>
                       </a:r>
                     </a:p>
                   </a:txBody>
@@ -4702,9 +4702,12 @@
                       <a:pPr algn="ctr"/>
                       <a:r>
                         <a:rPr sz="800">
+                          <a:solidFill>
+                            <a:srgbClr val="DC2626"/>
+                          </a:solidFill>
                           <a:latin typeface="Segoe UI"/>
                         </a:rPr>
-                        <a:t/>
+                        <a:t>5.3%</a:t>
                       </a:r>
                     </a:p>
                   </a:txBody>
@@ -4975,9 +4978,12 @@
                       <a:pPr algn="ctr"/>
                       <a:r>
                         <a:rPr sz="800">
+                          <a:solidFill>
+                            <a:srgbClr val="DC2626"/>
+                          </a:solidFill>
                           <a:latin typeface="Segoe UI"/>
                         </a:rPr>
-                        <a:t/>
+                        <a:t>1</a:t>
                       </a:r>
                     </a:p>
                   </a:txBody>

--- a/generated/Tier 1 Broker Scorecards/Dts Insurance Services Inc_Broker_Scorecard.pptx
+++ b/generated/Tier 1 Broker Scorecards/Dts Insurance Services Inc_Broker_Scorecard.pptx
@@ -3357,7 +3357,7 @@
                         <a:rPr sz="800">
                           <a:latin typeface="Segoe UI"/>
                         </a:rPr>
-                        <a:t>$907,581.59 / $1,044,378.10 / $510,624.44</a:t>
+                        <a:t>$907,581.59 / $1,055,331.43 / $521,577.77</a:t>
                       </a:r>
                     </a:p>
                   </a:txBody>
@@ -3394,7 +3394,7 @@
                         <a:rPr sz="900">
                           <a:latin typeface="Segoe UI"/>
                         </a:rPr>
-                        <a:t>Tier 1  |  9.91% / 15.00%</a:t>
+                        <a:t>Tier 1  |  10.81% / 15.00%</a:t>
                       </a:r>
                     </a:p>
                   </a:txBody>
@@ -3431,7 +3431,7 @@
                         <a:rPr sz="900">
                           <a:latin typeface="Segoe UI"/>
                         </a:rPr>
-                        <a:t>$1,270,614.23  (40.2% achieved)</a:t>
+                        <a:t>$1,270,614.23  (41.0% achieved)</a:t>
                       </a:r>
                     </a:p>
                   </a:txBody>
@@ -3653,7 +3653,7 @@
                         <a:rPr sz="900">
                           <a:latin typeface="Segoe UI"/>
                         </a:rPr>
-                        <a:t>Fleet Subs: 14  |  Binds: 0</a:t>
+                        <a:t>Fleet Subs: 14  |  Binds: 1</a:t>
                       </a:r>
                     </a:p>
                   </a:txBody>
@@ -3690,7 +3690,7 @@
                         <a:rPr sz="900">
                           <a:latin typeface="Segoe UI"/>
                         </a:rPr>
-                        <a:t>Fleet Bound Premium: $0.00</a:t>
+                        <a:t>Fleet Bound Premium: $101,712.76</a:t>
                       </a:r>
                     </a:p>
                   </a:txBody>
@@ -3727,7 +3727,7 @@
                         <a:rPr sz="900">
                           <a:latin typeface="Segoe UI"/>
                         </a:rPr>
-                        <a:t>Fleet Book %: 0.0%</a:t>
+                        <a:t>Fleet Book %: 19.5%</a:t>
                       </a:r>
                     </a:p>
                   </a:txBody>
@@ -3803,7 +3803,7 @@
                         <a:rPr sz="900">
                           <a:latin typeface="Segoe UI"/>
                         </a:rPr>
-                        <a:t>Non-Fleet Bound Premium: $510,624.44</a:t>
+                        <a:t>Non-Fleet Bound Premium: $419,865.01</a:t>
                       </a:r>
                     </a:p>
                   </a:txBody>
@@ -3840,7 +3840,7 @@
                         <a:rPr sz="900">
                           <a:latin typeface="Segoe UI"/>
                         </a:rPr>
-                        <a:t>Non-Fleet Book %: 100.0%</a:t>
+                        <a:t>Non-Fleet Book %: 80.5%</a:t>
                       </a:r>
                     </a:p>
                   </a:txBody>
@@ -4707,7 +4707,7 @@
                           </a:solidFill>
                           <a:latin typeface="Segoe UI"/>
                         </a:rPr>
-                        <a:t>5.3%</a:t>
+                        <a:t>10.5%</a:t>
                       </a:r>
                     </a:p>
                   </a:txBody>
@@ -4983,7 +4983,7 @@
                           </a:solidFill>
                           <a:latin typeface="Segoe UI"/>
                         </a:rPr>
-                        <a:t>1</a:t>
+                        <a:t>2</a:t>
                       </a:r>
                     </a:p>
                   </a:txBody>
@@ -5262,7 +5262,7 @@
                           </a:solidFill>
                           <a:latin typeface="Segoe UI"/>
                         </a:rPr>
-                        <a:t>$104.3K</a:t>
+                        <a:t>$115.3K</a:t>
                       </a:r>
                     </a:p>
                   </a:txBody>

--- a/generated/Tier 1 Broker Scorecards/Dts Insurance Services Inc_Broker_Scorecard.pptx
+++ b/generated/Tier 1 Broker Scorecards/Dts Insurance Services Inc_Broker_Scorecard.pptx
@@ -3357,7 +3357,7 @@
                         <a:rPr sz="800">
                           <a:latin typeface="Segoe UI"/>
                         </a:rPr>
-                        <a:t>$907,581.59 / $1,055,331.43 / $521,577.77</a:t>
+                        <a:t>$907,581.59 / $1,056,903.10 / $523,149.44</a:t>
                       </a:r>
                     </a:p>
                   </a:txBody>
@@ -3394,7 +3394,7 @@
                         <a:rPr sz="900">
                           <a:latin typeface="Segoe UI"/>
                         </a:rPr>
-                        <a:t>Tier 1  |  10.81% / 15.00%</a:t>
+                        <a:t>Tier 1  |  11.40% / 15.00%</a:t>
                       </a:r>
                     </a:p>
                   </a:txBody>
@@ -3431,7 +3431,7 @@
                         <a:rPr sz="900">
                           <a:latin typeface="Segoe UI"/>
                         </a:rPr>
-                        <a:t>$1,270,614.23  (41.0% achieved)</a:t>
+                        <a:t>$1,270,614.23  (41.2% achieved)</a:t>
                       </a:r>
                     </a:p>
                   </a:txBody>
@@ -3653,7 +3653,7 @@
                         <a:rPr sz="900">
                           <a:latin typeface="Segoe UI"/>
                         </a:rPr>
-                        <a:t>Fleet Subs: 14  |  Binds: 1</a:t>
+                        <a:t>Fleet Subs: 15  |  Binds: 2</a:t>
                       </a:r>
                     </a:p>
                   </a:txBody>
@@ -3690,7 +3690,7 @@
                         <a:rPr sz="900">
                           <a:latin typeface="Segoe UI"/>
                         </a:rPr>
-                        <a:t>Fleet Bound Premium: $101,712.76</a:t>
+                        <a:t>Fleet Bound Premium: $187,236.54</a:t>
                       </a:r>
                     </a:p>
                   </a:txBody>
@@ -3727,7 +3727,7 @@
                         <a:rPr sz="900">
                           <a:latin typeface="Segoe UI"/>
                         </a:rPr>
-                        <a:t>Fleet Book %: 19.5%</a:t>
+                        <a:t>Fleet Book %: 35.8%</a:t>
                       </a:r>
                     </a:p>
                   </a:txBody>
@@ -3766,7 +3766,7 @@
                         <a:rPr sz="900">
                           <a:latin typeface="Segoe UI"/>
                         </a:rPr>
-                        <a:t>Non-Fleet Subs: 97  |  Binds: 11</a:t>
+                        <a:t>Non-Fleet Subs: 99  |  Binds: 11</a:t>
                       </a:r>
                     </a:p>
                   </a:txBody>
@@ -3803,7 +3803,7 @@
                         <a:rPr sz="900">
                           <a:latin typeface="Segoe UI"/>
                         </a:rPr>
-                        <a:t>Non-Fleet Bound Premium: $419,865.01</a:t>
+                        <a:t>Non-Fleet Bound Premium: $335,912.90</a:t>
                       </a:r>
                     </a:p>
                   </a:txBody>
@@ -3840,7 +3840,7 @@
                         <a:rPr sz="900">
                           <a:latin typeface="Segoe UI"/>
                         </a:rPr>
-                        <a:t>Non-Fleet Book %: 80.5%</a:t>
+                        <a:t>Non-Fleet Book %: 64.2%</a:t>
                       </a:r>
                     </a:p>
                   </a:txBody>
@@ -4424,11 +4424,11 @@
                       <a:r>
                         <a:rPr sz="800">
                           <a:solidFill>
-                            <a:srgbClr val="DC2626"/>
+                            <a:srgbClr val="059669"/>
                           </a:solidFill>
                           <a:latin typeface="Segoe UI"/>
                         </a:rPr>
-                        <a:t>19</a:t>
+                        <a:t>22</a:t>
                       </a:r>
                     </a:p>
                   </a:txBody>
@@ -4707,7 +4707,7 @@
                           </a:solidFill>
                           <a:latin typeface="Segoe UI"/>
                         </a:rPr>
-                        <a:t>10.5%</a:t>
+                        <a:t>9.1%</a:t>
                       </a:r>
                     </a:p>
                   </a:txBody>
@@ -5262,7 +5262,7 @@
                           </a:solidFill>
                           <a:latin typeface="Segoe UI"/>
                         </a:rPr>
-                        <a:t>$115.3K</a:t>
+                        <a:t>$116.8K</a:t>
                       </a:r>
                     </a:p>
                   </a:txBody>

--- a/generated/Tier 1 Broker Scorecards/Dts Insurance Services Inc_Broker_Scorecard.pptx
+++ b/generated/Tier 1 Broker Scorecards/Dts Insurance Services Inc_Broker_Scorecard.pptx
@@ -3357,7 +3357,7 @@
                         <a:rPr sz="800">
                           <a:latin typeface="Segoe UI"/>
                         </a:rPr>
-                        <a:t>$907,581.59 / $1,056,903.10 / $523,149.44</a:t>
+                        <a:t>$907,581.59 / $1,074,673.94 / $540,920.28</a:t>
                       </a:r>
                     </a:p>
                   </a:txBody>
@@ -3394,7 +3394,7 @@
                         <a:rPr sz="900">
                           <a:latin typeface="Segoe UI"/>
                         </a:rPr>
-                        <a:t>Tier 1  |  11.40% / 15.00%</a:t>
+                        <a:t>Tier 1  |  10.26% / 15.00%</a:t>
                       </a:r>
                     </a:p>
                   </a:txBody>
@@ -3431,7 +3431,7 @@
                         <a:rPr sz="900">
                           <a:latin typeface="Segoe UI"/>
                         </a:rPr>
-                        <a:t>$1,270,614.23  (41.2% achieved)</a:t>
+                        <a:t>$1,270,614.23  (42.6% achieved)</a:t>
                       </a:r>
                     </a:p>
                   </a:txBody>
@@ -3690,7 +3690,7 @@
                         <a:rPr sz="900">
                           <a:latin typeface="Segoe UI"/>
                         </a:rPr>
-                        <a:t>Fleet Bound Premium: $187,236.54</a:t>
+                        <a:t>Fleet Bound Premium: $214,611.16</a:t>
                       </a:r>
                     </a:p>
                   </a:txBody>
@@ -3727,7 +3727,7 @@
                         <a:rPr sz="900">
                           <a:latin typeface="Segoe UI"/>
                         </a:rPr>
-                        <a:t>Fleet Book %: 35.8%</a:t>
+                        <a:t>Fleet Book %: 39.7%</a:t>
                       </a:r>
                     </a:p>
                   </a:txBody>
@@ -3766,7 +3766,7 @@
                         <a:rPr sz="900">
                           <a:latin typeface="Segoe UI"/>
                         </a:rPr>
-                        <a:t>Non-Fleet Subs: 99  |  Binds: 11</a:t>
+                        <a:t>Non-Fleet Subs: 102  |  Binds: 10</a:t>
                       </a:r>
                     </a:p>
                   </a:txBody>
@@ -3803,7 +3803,7 @@
                         <a:rPr sz="900">
                           <a:latin typeface="Segoe UI"/>
                         </a:rPr>
-                        <a:t>Non-Fleet Bound Premium: $335,912.90</a:t>
+                        <a:t>Non-Fleet Bound Premium: $326,309.12</a:t>
                       </a:r>
                     </a:p>
                   </a:txBody>
@@ -3840,7 +3840,7 @@
                         <a:rPr sz="900">
                           <a:latin typeface="Segoe UI"/>
                         </a:rPr>
-                        <a:t>Non-Fleet Book %: 64.2%</a:t>
+                        <a:t>Non-Fleet Book %: 60.3%</a:t>
                       </a:r>
                     </a:p>
                   </a:txBody>
@@ -4428,7 +4428,7 @@
                           </a:solidFill>
                           <a:latin typeface="Segoe UI"/>
                         </a:rPr>
-                        <a:t>22</a:t>
+                        <a:t>26</a:t>
                       </a:r>
                     </a:p>
                   </a:txBody>
@@ -4707,7 +4707,7 @@
                           </a:solidFill>
                           <a:latin typeface="Segoe UI"/>
                         </a:rPr>
-                        <a:t>9.1%</a:t>
+                        <a:t>11.5%</a:t>
                       </a:r>
                     </a:p>
                   </a:txBody>
@@ -4983,7 +4983,7 @@
                           </a:solidFill>
                           <a:latin typeface="Segoe UI"/>
                         </a:rPr>
-                        <a:t>2</a:t>
+                        <a:t>3</a:t>
                       </a:r>
                     </a:p>
                   </a:txBody>
@@ -5262,7 +5262,7 @@
                           </a:solidFill>
                           <a:latin typeface="Segoe UI"/>
                         </a:rPr>
-                        <a:t>$116.8K</a:t>
+                        <a:t>$134.6K</a:t>
                       </a:r>
                     </a:p>
                   </a:txBody>

--- a/generated/Tier 1 Broker Scorecards/Dts Insurance Services Inc_Broker_Scorecard.pptx
+++ b/generated/Tier 1 Broker Scorecards/Dts Insurance Services Inc_Broker_Scorecard.pptx
@@ -3357,7 +3357,7 @@
                         <a:rPr sz="800">
                           <a:latin typeface="Segoe UI"/>
                         </a:rPr>
-                        <a:t>$907,581.59 / $1,074,673.94 / $540,920.28</a:t>
+                        <a:t>$907,581.59 / $1,073,162.03 / $539,408.37</a:t>
                       </a:r>
                     </a:p>
                   </a:txBody>
@@ -3394,7 +3394,7 @@
                         <a:rPr sz="900">
                           <a:latin typeface="Segoe UI"/>
                         </a:rPr>
-                        <a:t>Tier 1  |  10.26% / 15.00%</a:t>
+                        <a:t>Tier 1  |  10.17% / 15.00%</a:t>
                       </a:r>
                     </a:p>
                   </a:txBody>
@@ -3431,7 +3431,7 @@
                         <a:rPr sz="900">
                           <a:latin typeface="Segoe UI"/>
                         </a:rPr>
-                        <a:t>$1,270,614.23  (42.6% achieved)</a:t>
+                        <a:t>$1,270,614.23  (42.5% achieved)</a:t>
                       </a:r>
                     </a:p>
                   </a:txBody>
@@ -3690,7 +3690,7 @@
                         <a:rPr sz="900">
                           <a:latin typeface="Segoe UI"/>
                         </a:rPr>
-                        <a:t>Fleet Bound Premium: $214,611.16</a:t>
+                        <a:t>Fleet Bound Premium: $201,772.29</a:t>
                       </a:r>
                     </a:p>
                   </a:txBody>
@@ -3727,7 +3727,7 @@
                         <a:rPr sz="900">
                           <a:latin typeface="Segoe UI"/>
                         </a:rPr>
-                        <a:t>Fleet Book %: 39.7%</a:t>
+                        <a:t>Fleet Book %: 37.4%</a:t>
                       </a:r>
                     </a:p>
                   </a:txBody>
@@ -3766,7 +3766,7 @@
                         <a:rPr sz="900">
                           <a:latin typeface="Segoe UI"/>
                         </a:rPr>
-                        <a:t>Non-Fleet Subs: 102  |  Binds: 10</a:t>
+                        <a:t>Non-Fleet Subs: 103  |  Binds: 10</a:t>
                       </a:r>
                     </a:p>
                   </a:txBody>
@@ -3803,7 +3803,7 @@
                         <a:rPr sz="900">
                           <a:latin typeface="Segoe UI"/>
                         </a:rPr>
-                        <a:t>Non-Fleet Bound Premium: $326,309.12</a:t>
+                        <a:t>Non-Fleet Bound Premium: $337,636.08</a:t>
                       </a:r>
                     </a:p>
                   </a:txBody>
@@ -3840,7 +3840,7 @@
                         <a:rPr sz="900">
                           <a:latin typeface="Segoe UI"/>
                         </a:rPr>
-                        <a:t>Non-Fleet Book %: 60.3%</a:t>
+                        <a:t>Non-Fleet Book %: 62.6%</a:t>
                       </a:r>
                     </a:p>
                   </a:txBody>
@@ -4428,7 +4428,7 @@
                           </a:solidFill>
                           <a:latin typeface="Segoe UI"/>
                         </a:rPr>
-                        <a:t>26</a:t>
+                        <a:t>27</a:t>
                       </a:r>
                     </a:p>
                   </a:txBody>
@@ -4707,7 +4707,7 @@
                           </a:solidFill>
                           <a:latin typeface="Segoe UI"/>
                         </a:rPr>
-                        <a:t>11.5%</a:t>
+                        <a:t>11.1%</a:t>
                       </a:r>
                     </a:p>
                   </a:txBody>
@@ -5262,7 +5262,7 @@
                           </a:solidFill>
                           <a:latin typeface="Segoe UI"/>
                         </a:rPr>
-                        <a:t>$134.6K</a:t>
+                        <a:t>$133.1K</a:t>
                       </a:r>
                     </a:p>
                   </a:txBody>

--- a/generated/Tier 1 Broker Scorecards/Dts Insurance Services Inc_Broker_Scorecard.pptx
+++ b/generated/Tier 1 Broker Scorecards/Dts Insurance Services Inc_Broker_Scorecard.pptx
@@ -3357,7 +3357,7 @@
                         <a:rPr sz="800">
                           <a:latin typeface="Segoe UI"/>
                         </a:rPr>
-                        <a:t>$907,581.59 / $1,073,162.03 / $539,408.37</a:t>
+                        <a:t>$907,581.59 / $1,104,375.10 / $570,621.44</a:t>
                       </a:r>
                     </a:p>
                   </a:txBody>
@@ -3394,7 +3394,7 @@
                         <a:rPr sz="900">
                           <a:latin typeface="Segoe UI"/>
                         </a:rPr>
-                        <a:t>Tier 1  |  10.17% / 15.00%</a:t>
+                        <a:t>Tier 1  |  10.92% / 15.00%</a:t>
                       </a:r>
                     </a:p>
                   </a:txBody>
@@ -3431,7 +3431,7 @@
                         <a:rPr sz="900">
                           <a:latin typeface="Segoe UI"/>
                         </a:rPr>
-                        <a:t>$1,270,614.23  (42.5% achieved)</a:t>
+                        <a:t>$1,270,614.23  (44.9% achieved)</a:t>
                       </a:r>
                     </a:p>
                   </a:txBody>
@@ -3690,7 +3690,7 @@
                         <a:rPr sz="900">
                           <a:latin typeface="Segoe UI"/>
                         </a:rPr>
-                        <a:t>Fleet Bound Premium: $201,772.29</a:t>
+                        <a:t>Fleet Bound Premium: $198,656.25</a:t>
                       </a:r>
                     </a:p>
                   </a:txBody>
@@ -3727,7 +3727,7 @@
                         <a:rPr sz="900">
                           <a:latin typeface="Segoe UI"/>
                         </a:rPr>
-                        <a:t>Fleet Book %: 37.4%</a:t>
+                        <a:t>Fleet Book %: 34.8%</a:t>
                       </a:r>
                     </a:p>
                   </a:txBody>
@@ -3766,7 +3766,7 @@
                         <a:rPr sz="900">
                           <a:latin typeface="Segoe UI"/>
                         </a:rPr>
-                        <a:t>Non-Fleet Subs: 103  |  Binds: 10</a:t>
+                        <a:t>Non-Fleet Subs: 104  |  Binds: 11</a:t>
                       </a:r>
                     </a:p>
                   </a:txBody>
@@ -3803,7 +3803,7 @@
                         <a:rPr sz="900">
                           <a:latin typeface="Segoe UI"/>
                         </a:rPr>
-                        <a:t>Non-Fleet Bound Premium: $337,636.08</a:t>
+                        <a:t>Non-Fleet Bound Premium: $371,965.19</a:t>
                       </a:r>
                     </a:p>
                   </a:txBody>
@@ -3840,7 +3840,7 @@
                         <a:rPr sz="900">
                           <a:latin typeface="Segoe UI"/>
                         </a:rPr>
-                        <a:t>Non-Fleet Book %: 62.6%</a:t>
+                        <a:t>Non-Fleet Book %: 65.2%</a:t>
                       </a:r>
                     </a:p>
                   </a:txBody>
@@ -4428,7 +4428,7 @@
                           </a:solidFill>
                           <a:latin typeface="Segoe UI"/>
                         </a:rPr>
-                        <a:t>27</a:t>
+                        <a:t>28</a:t>
                       </a:r>
                     </a:p>
                   </a:txBody>
@@ -4707,7 +4707,7 @@
                           </a:solidFill>
                           <a:latin typeface="Segoe UI"/>
                         </a:rPr>
-                        <a:t>11.1%</a:t>
+                        <a:t>10.7%</a:t>
                       </a:r>
                     </a:p>
                   </a:txBody>
@@ -5262,7 +5262,7 @@
                           </a:solidFill>
                           <a:latin typeface="Segoe UI"/>
                         </a:rPr>
-                        <a:t>$133.1K</a:t>
+                        <a:t>$164.3K</a:t>
                       </a:r>
                     </a:p>
                   </a:txBody>

--- a/generated/Tier 1 Broker Scorecards/Dts Insurance Services Inc_Broker_Scorecard.pptx
+++ b/generated/Tier 1 Broker Scorecards/Dts Insurance Services Inc_Broker_Scorecard.pptx
@@ -3394,7 +3394,7 @@
                         <a:rPr sz="900">
                           <a:latin typeface="Segoe UI"/>
                         </a:rPr>
-                        <a:t>Tier 1  |  10.92% / 15.00%</a:t>
+                        <a:t>Tier 1  |  11.76% / 15.00%</a:t>
                       </a:r>
                     </a:p>
                   </a:txBody>
@@ -3690,7 +3690,7 @@
                         <a:rPr sz="900">
                           <a:latin typeface="Segoe UI"/>
                         </a:rPr>
-                        <a:t>Fleet Bound Premium: $198,656.25</a:t>
+                        <a:t>Fleet Bound Premium: $190,199.41</a:t>
                       </a:r>
                     </a:p>
                   </a:txBody>
@@ -3727,7 +3727,7 @@
                         <a:rPr sz="900">
                           <a:latin typeface="Segoe UI"/>
                         </a:rPr>
-                        <a:t>Fleet Book %: 34.8%</a:t>
+                        <a:t>Fleet Book %: 33.3%</a:t>
                       </a:r>
                     </a:p>
                   </a:txBody>
@@ -3766,7 +3766,7 @@
                         <a:rPr sz="900">
                           <a:latin typeface="Segoe UI"/>
                         </a:rPr>
-                        <a:t>Non-Fleet Subs: 104  |  Binds: 11</a:t>
+                        <a:t>Non-Fleet Subs: 104  |  Binds: 12</a:t>
                       </a:r>
                     </a:p>
                   </a:txBody>
@@ -3803,7 +3803,7 @@
                         <a:rPr sz="900">
                           <a:latin typeface="Segoe UI"/>
                         </a:rPr>
-                        <a:t>Non-Fleet Bound Premium: $371,965.19</a:t>
+                        <a:t>Non-Fleet Bound Premium: $380,422.03</a:t>
                       </a:r>
                     </a:p>
                   </a:txBody>
@@ -3840,7 +3840,7 @@
                         <a:rPr sz="900">
                           <a:latin typeface="Segoe UI"/>
                         </a:rPr>
-                        <a:t>Non-Fleet Book %: 65.2%</a:t>
+                        <a:t>Non-Fleet Book %: 66.7%</a:t>
                       </a:r>
                     </a:p>
                   </a:txBody>
@@ -4707,7 +4707,7 @@
                           </a:solidFill>
                           <a:latin typeface="Segoe UI"/>
                         </a:rPr>
-                        <a:t>10.7%</a:t>
+                        <a:t>14.3%</a:t>
                       </a:r>
                     </a:p>
                   </a:txBody>
@@ -4983,7 +4983,7 @@
                           </a:solidFill>
                           <a:latin typeface="Segoe UI"/>
                         </a:rPr>
-                        <a:t>3</a:t>
+                        <a:t>4</a:t>
                       </a:r>
                     </a:p>
                   </a:txBody>

--- a/generated/Tier 1 Broker Scorecards/Dts Insurance Services Inc_Broker_Scorecard.pptx
+++ b/generated/Tier 1 Broker Scorecards/Dts Insurance Services Inc_Broker_Scorecard.pptx
@@ -3357,7 +3357,7 @@
                         <a:rPr sz="800">
                           <a:latin typeface="Segoe UI"/>
                         </a:rPr>
-                        <a:t>$907,581.59 / $1,104,375.10 / $570,621.44</a:t>
+                        <a:t>$907,581.59 / $1,105,604.22 / $571,850.56</a:t>
                       </a:r>
                     </a:p>
                   </a:txBody>
@@ -3394,7 +3394,7 @@
                         <a:rPr sz="900">
                           <a:latin typeface="Segoe UI"/>
                         </a:rPr>
-                        <a:t>Tier 1  |  11.76% / 15.00%</a:t>
+                        <a:t>Tier 1  |  12.50% / 15.00%</a:t>
                       </a:r>
                     </a:p>
                   </a:txBody>
@@ -3431,7 +3431,7 @@
                         <a:rPr sz="900">
                           <a:latin typeface="Segoe UI"/>
                         </a:rPr>
-                        <a:t>$1,270,614.23  (44.9% achieved)</a:t>
+                        <a:t>$1,270,614.23  (45.0% achieved)</a:t>
                       </a:r>
                     </a:p>
                   </a:txBody>
@@ -3690,7 +3690,7 @@
                         <a:rPr sz="900">
                           <a:latin typeface="Segoe UI"/>
                         </a:rPr>
-                        <a:t>Fleet Bound Premium: $190,199.41</a:t>
+                        <a:t>Fleet Bound Premium: $184,353.01</a:t>
                       </a:r>
                     </a:p>
                   </a:txBody>
@@ -3727,7 +3727,7 @@
                         <a:rPr sz="900">
                           <a:latin typeface="Segoe UI"/>
                         </a:rPr>
-                        <a:t>Fleet Book %: 33.3%</a:t>
+                        <a:t>Fleet Book %: 32.2%</a:t>
                       </a:r>
                     </a:p>
                   </a:txBody>
@@ -3766,7 +3766,7 @@
                         <a:rPr sz="900">
                           <a:latin typeface="Segoe UI"/>
                         </a:rPr>
-                        <a:t>Non-Fleet Subs: 104  |  Binds: 12</a:t>
+                        <a:t>Non-Fleet Subs: 105  |  Binds: 13</a:t>
                       </a:r>
                     </a:p>
                   </a:txBody>
@@ -3803,7 +3803,7 @@
                         <a:rPr sz="900">
                           <a:latin typeface="Segoe UI"/>
                         </a:rPr>
-                        <a:t>Non-Fleet Bound Premium: $380,422.03</a:t>
+                        <a:t>Non-Fleet Bound Premium: $387,497.55</a:t>
                       </a:r>
                     </a:p>
                   </a:txBody>
@@ -3840,7 +3840,7 @@
                         <a:rPr sz="900">
                           <a:latin typeface="Segoe UI"/>
                         </a:rPr>
-                        <a:t>Non-Fleet Book %: 66.7%</a:t>
+                        <a:t>Non-Fleet Book %: 67.8%</a:t>
                       </a:r>
                     </a:p>
                   </a:txBody>
@@ -4428,7 +4428,7 @@
                           </a:solidFill>
                           <a:latin typeface="Segoe UI"/>
                         </a:rPr>
-                        <a:t>28</a:t>
+                        <a:t>29</a:t>
                       </a:r>
                     </a:p>
                   </a:txBody>
@@ -4707,7 +4707,7 @@
                           </a:solidFill>
                           <a:latin typeface="Segoe UI"/>
                         </a:rPr>
-                        <a:t>14.3%</a:t>
+                        <a:t>17.2%</a:t>
                       </a:r>
                     </a:p>
                   </a:txBody>
@@ -4983,7 +4983,7 @@
                           </a:solidFill>
                           <a:latin typeface="Segoe UI"/>
                         </a:rPr>
-                        <a:t>4</a:t>
+                        <a:t>5</a:t>
                       </a:r>
                     </a:p>
                   </a:txBody>
@@ -5262,7 +5262,7 @@
                           </a:solidFill>
                           <a:latin typeface="Segoe UI"/>
                         </a:rPr>
-                        <a:t>$164.3K</a:t>
+                        <a:t>$165.5K</a:t>
                       </a:r>
                     </a:p>
                   </a:txBody>

--- a/generated/Tier 1 Broker Scorecards/Dts Insurance Services Inc_Broker_Scorecard.pptx
+++ b/generated/Tier 1 Broker Scorecards/Dts Insurance Services Inc_Broker_Scorecard.pptx
@@ -3357,7 +3357,7 @@
                         <a:rPr sz="800">
                           <a:latin typeface="Segoe UI"/>
                         </a:rPr>
-                        <a:t>$907,581.59 / $1,105,604.22 / $571,850.56</a:t>
+                        <a:t>$907,581.59 / $1,106,963.14 / $573,209.48</a:t>
                       </a:r>
                     </a:p>
                   </a:txBody>
@@ -3394,7 +3394,7 @@
                         <a:rPr sz="900">
                           <a:latin typeface="Segoe UI"/>
                         </a:rPr>
-                        <a:t>Tier 1  |  12.50% / 15.00%</a:t>
+                        <a:t>Tier 1  |  12.30% / 15.00%</a:t>
                       </a:r>
                     </a:p>
                   </a:txBody>
@@ -3431,7 +3431,7 @@
                         <a:rPr sz="900">
                           <a:latin typeface="Segoe UI"/>
                         </a:rPr>
-                        <a:t>$1,270,614.23  (45.0% achieved)</a:t>
+                        <a:t>$1,270,614.23  (45.1% achieved)</a:t>
                       </a:r>
                     </a:p>
                   </a:txBody>
@@ -3690,7 +3690,7 @@
                         <a:rPr sz="900">
                           <a:latin typeface="Segoe UI"/>
                         </a:rPr>
-                        <a:t>Fleet Bound Premium: $184,353.01</a:t>
+                        <a:t>Fleet Bound Premium: $190,700.86</a:t>
                       </a:r>
                     </a:p>
                   </a:txBody>
@@ -3727,7 +3727,7 @@
                         <a:rPr sz="900">
                           <a:latin typeface="Segoe UI"/>
                         </a:rPr>
-                        <a:t>Fleet Book %: 32.2%</a:t>
+                        <a:t>Fleet Book %: 33.3%</a:t>
                       </a:r>
                     </a:p>
                   </a:txBody>
@@ -3766,7 +3766,7 @@
                         <a:rPr sz="900">
                           <a:latin typeface="Segoe UI"/>
                         </a:rPr>
-                        <a:t>Non-Fleet Subs: 105  |  Binds: 13</a:t>
+                        <a:t>Non-Fleet Subs: 107  |  Binds: 13</a:t>
                       </a:r>
                     </a:p>
                   </a:txBody>
@@ -3803,7 +3803,7 @@
                         <a:rPr sz="900">
                           <a:latin typeface="Segoe UI"/>
                         </a:rPr>
-                        <a:t>Non-Fleet Bound Premium: $387,497.55</a:t>
+                        <a:t>Non-Fleet Bound Premium: $382,508.62</a:t>
                       </a:r>
                     </a:p>
                   </a:txBody>
@@ -3840,7 +3840,7 @@
                         <a:rPr sz="900">
                           <a:latin typeface="Segoe UI"/>
                         </a:rPr>
-                        <a:t>Non-Fleet Book %: 67.8%</a:t>
+                        <a:t>Non-Fleet Book %: 66.7%</a:t>
                       </a:r>
                     </a:p>
                   </a:txBody>
@@ -4428,7 +4428,7 @@
                           </a:solidFill>
                           <a:latin typeface="Segoe UI"/>
                         </a:rPr>
-                        <a:t>29</a:t>
+                        <a:t>32</a:t>
                       </a:r>
                     </a:p>
                   </a:txBody>
@@ -4707,7 +4707,7 @@
                           </a:solidFill>
                           <a:latin typeface="Segoe UI"/>
                         </a:rPr>
-                        <a:t>17.2%</a:t>
+                        <a:t>18.8%</a:t>
                       </a:r>
                     </a:p>
                   </a:txBody>
@@ -4978,12 +4978,9 @@
                       <a:pPr algn="ctr"/>
                       <a:r>
                         <a:rPr sz="800">
-                          <a:solidFill>
-                            <a:srgbClr val="DC2626"/>
-                          </a:solidFill>
                           <a:latin typeface="Segoe UI"/>
                         </a:rPr>
-                        <a:t>5</a:t>
+                        <a:t>6</a:t>
                       </a:r>
                     </a:p>
                   </a:txBody>
@@ -5262,7 +5259,7 @@
                           </a:solidFill>
                           <a:latin typeface="Segoe UI"/>
                         </a:rPr>
-                        <a:t>$165.5K</a:t>
+                        <a:t>$166.9K</a:t>
                       </a:r>
                     </a:p>
                   </a:txBody>

--- a/generated/Tier 1 Broker Scorecards/Dts Insurance Services Inc_Broker_Scorecard.pptx
+++ b/generated/Tier 1 Broker Scorecards/Dts Insurance Services Inc_Broker_Scorecard.pptx
@@ -3357,7 +3357,7 @@
                         <a:rPr sz="800">
                           <a:latin typeface="Segoe UI"/>
                         </a:rPr>
-                        <a:t>$907,581.59 / $1,106,963.14 / $573,209.48</a:t>
+                        <a:t>$907,581.59 / $1,123,547.28 / $589,793.62</a:t>
                       </a:r>
                     </a:p>
                   </a:txBody>
@@ -3394,7 +3394,7 @@
                         <a:rPr sz="900">
                           <a:latin typeface="Segoe UI"/>
                         </a:rPr>
-                        <a:t>Tier 1  |  12.30% / 15.00%</a:t>
+                        <a:t>Tier 1  |  13.93% / 15.00%</a:t>
                       </a:r>
                     </a:p>
                   </a:txBody>
@@ -3431,7 +3431,7 @@
                         <a:rPr sz="900">
                           <a:latin typeface="Segoe UI"/>
                         </a:rPr>
-                        <a:t>$1,270,614.23  (45.1% achieved)</a:t>
+                        <a:t>$1,270,614.23  (46.4% achieved)</a:t>
                       </a:r>
                     </a:p>
                   </a:txBody>
@@ -3690,7 +3690,7 @@
                         <a:rPr sz="900">
                           <a:latin typeface="Segoe UI"/>
                         </a:rPr>
-                        <a:t>Fleet Bound Premium: $190,700.86</a:t>
+                        <a:t>Fleet Bound Premium: $209,798.32</a:t>
                       </a:r>
                     </a:p>
                   </a:txBody>
@@ -3727,7 +3727,7 @@
                         <a:rPr sz="900">
                           <a:latin typeface="Segoe UI"/>
                         </a:rPr>
-                        <a:t>Fleet Book %: 33.3%</a:t>
+                        <a:t>Fleet Book %: 35.6%</a:t>
                       </a:r>
                     </a:p>
                   </a:txBody>
@@ -3766,7 +3766,7 @@
                         <a:rPr sz="900">
                           <a:latin typeface="Segoe UI"/>
                         </a:rPr>
-                        <a:t>Non-Fleet Subs: 107  |  Binds: 13</a:t>
+                        <a:t>Non-Fleet Subs: 107  |  Binds: 15</a:t>
                       </a:r>
                     </a:p>
                   </a:txBody>
@@ -3803,7 +3803,7 @@
                         <a:rPr sz="900">
                           <a:latin typeface="Segoe UI"/>
                         </a:rPr>
-                        <a:t>Non-Fleet Bound Premium: $382,508.62</a:t>
+                        <a:t>Non-Fleet Bound Premium: $379,995.30</a:t>
                       </a:r>
                     </a:p>
                   </a:txBody>
@@ -3840,7 +3840,7 @@
                         <a:rPr sz="900">
                           <a:latin typeface="Segoe UI"/>
                         </a:rPr>
-                        <a:t>Non-Fleet Book %: 66.7%</a:t>
+                        <a:t>Non-Fleet Book %: 64.4%</a:t>
                       </a:r>
                     </a:p>
                   </a:txBody>
@@ -4428,7 +4428,7 @@
                           </a:solidFill>
                           <a:latin typeface="Segoe UI"/>
                         </a:rPr>
-                        <a:t>32</a:t>
+                        <a:t>33</a:t>
                       </a:r>
                     </a:p>
                   </a:txBody>
@@ -4707,7 +4707,7 @@
                           </a:solidFill>
                           <a:latin typeface="Segoe UI"/>
                         </a:rPr>
-                        <a:t>18.8%</a:t>
+                        <a:t>24.2%</a:t>
                       </a:r>
                     </a:p>
                   </a:txBody>
@@ -4978,9 +4978,12 @@
                       <a:pPr algn="ctr"/>
                       <a:r>
                         <a:rPr sz="800">
+                          <a:solidFill>
+                            <a:srgbClr val="059669"/>
+                          </a:solidFill>
                           <a:latin typeface="Segoe UI"/>
                         </a:rPr>
-                        <a:t>6</a:t>
+                        <a:t>8</a:t>
                       </a:r>
                     </a:p>
                   </a:txBody>
@@ -5259,7 +5262,7 @@
                           </a:solidFill>
                           <a:latin typeface="Segoe UI"/>
                         </a:rPr>
-                        <a:t>$166.9K</a:t>
+                        <a:t>$183.5K</a:t>
                       </a:r>
                     </a:p>
                   </a:txBody>

--- a/generated/Tier 1 Broker Scorecards/Dts Insurance Services Inc_Broker_Scorecard.pptx
+++ b/generated/Tier 1 Broker Scorecards/Dts Insurance Services Inc_Broker_Scorecard.pptx
@@ -3394,7 +3394,7 @@
                         <a:rPr sz="900">
                           <a:latin typeface="Segoe UI"/>
                         </a:rPr>
-                        <a:t>Tier 1  |  13.93% / 15.00%</a:t>
+                        <a:t>Tier 1  |  14.63% / 15.00%</a:t>
                       </a:r>
                     </a:p>
                   </a:txBody>
@@ -3690,7 +3690,7 @@
                         <a:rPr sz="900">
                           <a:latin typeface="Segoe UI"/>
                         </a:rPr>
-                        <a:t>Fleet Bound Premium: $209,798.32</a:t>
+                        <a:t>Fleet Bound Premium: $157,660.42</a:t>
                       </a:r>
                     </a:p>
                   </a:txBody>
@@ -3727,7 +3727,7 @@
                         <a:rPr sz="900">
                           <a:latin typeface="Segoe UI"/>
                         </a:rPr>
-                        <a:t>Fleet Book %: 35.6%</a:t>
+                        <a:t>Fleet Book %: 26.7%</a:t>
                       </a:r>
                     </a:p>
                   </a:txBody>
@@ -3766,7 +3766,7 @@
                         <a:rPr sz="900">
                           <a:latin typeface="Segoe UI"/>
                         </a:rPr>
-                        <a:t>Non-Fleet Subs: 107  |  Binds: 15</a:t>
+                        <a:t>Non-Fleet Subs: 108  |  Binds: 16</a:t>
                       </a:r>
                     </a:p>
                   </a:txBody>
@@ -3803,7 +3803,7 @@
                         <a:rPr sz="900">
                           <a:latin typeface="Segoe UI"/>
                         </a:rPr>
-                        <a:t>Non-Fleet Bound Premium: $379,995.30</a:t>
+                        <a:t>Non-Fleet Bound Premium: $432,133.20</a:t>
                       </a:r>
                     </a:p>
                   </a:txBody>
@@ -3840,7 +3840,7 @@
                         <a:rPr sz="900">
                           <a:latin typeface="Segoe UI"/>
                         </a:rPr>
-                        <a:t>Non-Fleet Book %: 64.4%</a:t>
+                        <a:t>Non-Fleet Book %: 73.3%</a:t>
                       </a:r>
                     </a:p>
                   </a:txBody>
@@ -4428,7 +4428,7 @@
                           </a:solidFill>
                           <a:latin typeface="Segoe UI"/>
                         </a:rPr>
-                        <a:t>33</a:t>
+                        <a:t>34</a:t>
                       </a:r>
                     </a:p>
                   </a:txBody>
@@ -4707,7 +4707,7 @@
                           </a:solidFill>
                           <a:latin typeface="Segoe UI"/>
                         </a:rPr>
-                        <a:t>24.2%</a:t>
+                        <a:t>23.5%</a:t>
                       </a:r>
                     </a:p>
                   </a:txBody>

--- a/generated/Tier 1 Broker Scorecards/Dts Insurance Services Inc_Broker_Scorecard.pptx
+++ b/generated/Tier 1 Broker Scorecards/Dts Insurance Services Inc_Broker_Scorecard.pptx
@@ -3357,7 +3357,7 @@
                         <a:rPr sz="800">
                           <a:latin typeface="Segoe UI"/>
                         </a:rPr>
-                        <a:t>$907,581.59 / $1,123,547.28 / $589,793.62</a:t>
+                        <a:t>$907,581.59 / $1,075,097.58 / $589,793.62</a:t>
                       </a:r>
                     </a:p>
                   </a:txBody>
